--- a/docs/energy consumption (1).pptx
+++ b/docs/energy consumption (1).pptx
@@ -170,735 +170,6 @@
 </p1510:revInfo>
 </file>
 
-<file path=ppt/changesInfos/changesInfo1.xml><?xml version="1.0" encoding="utf-8"?>
-<pc:chgInfo xmlns:a="http://schemas.openxmlformats.org/drawingml/2006/main" xmlns:r="http://schemas.openxmlformats.org/officeDocument/2006/relationships" xmlns:ac="http://schemas.microsoft.com/office/drawing/2013/main/command" xmlns:pc="http://schemas.microsoft.com/office/powerpoint/2013/main/command">
-  <pc:docChgLst>
-    <pc:chgData name="Pasala Harini" userId="a43fac1939f8d205" providerId="LiveId" clId="{E7A54BC8-65DA-4538-AAED-9F147DC6437B}"/>
-    <pc:docChg chg="undo custSel addSld delSld modSld sldOrd">
-      <pc:chgData name="Pasala Harini" userId="a43fac1939f8d205" providerId="LiveId" clId="{E7A54BC8-65DA-4538-AAED-9F147DC6437B}" dt="2026-09-30T17:08:18.236" v="701" actId="14100"/>
-      <pc:docMkLst>
-        <pc:docMk/>
-      </pc:docMkLst>
-      <pc:sldChg chg="addSp delSp modSp mod">
-        <pc:chgData name="Pasala Harini" userId="a43fac1939f8d205" providerId="LiveId" clId="{E7A54BC8-65DA-4538-AAED-9F147DC6437B}" dt="2026-09-29T17:37:44.151" v="225" actId="207"/>
-        <pc:sldMkLst>
-          <pc:docMk/>
-          <pc:sldMk cId="0" sldId="256"/>
-        </pc:sldMkLst>
-        <pc:spChg chg="add del mod">
-          <ac:chgData name="Pasala Harini" userId="a43fac1939f8d205" providerId="LiveId" clId="{E7A54BC8-65DA-4538-AAED-9F147DC6437B}" dt="2026-09-29T17:37:30.489" v="223"/>
-          <ac:spMkLst>
-            <pc:docMk/>
-            <pc:sldMk cId="0" sldId="256"/>
-            <ac:spMk id="3" creationId="{ACA83DD6-ED38-640D-F3E6-BC5BB6C39CF5}"/>
-          </ac:spMkLst>
-        </pc:spChg>
-        <pc:spChg chg="mod">
-          <ac:chgData name="Pasala Harini" userId="a43fac1939f8d205" providerId="LiveId" clId="{E7A54BC8-65DA-4538-AAED-9F147DC6437B}" dt="2026-09-29T17:37:44.151" v="225" actId="207"/>
-          <ac:spMkLst>
-            <pc:docMk/>
-            <pc:sldMk cId="0" sldId="256"/>
-            <ac:spMk id="4" creationId="{00000000-0000-0000-0000-000000000000}"/>
-          </ac:spMkLst>
-        </pc:spChg>
-        <pc:spChg chg="mod">
-          <ac:chgData name="Pasala Harini" userId="a43fac1939f8d205" providerId="LiveId" clId="{E7A54BC8-65DA-4538-AAED-9F147DC6437B}" dt="2026-09-29T17:37:22.581" v="219" actId="1076"/>
-          <ac:spMkLst>
-            <pc:docMk/>
-            <pc:sldMk cId="0" sldId="256"/>
-            <ac:spMk id="6" creationId="{00000000-0000-0000-0000-000000000000}"/>
-          </ac:spMkLst>
-        </pc:spChg>
-      </pc:sldChg>
-      <pc:sldChg chg="modSp mod">
-        <pc:chgData name="Pasala Harini" userId="a43fac1939f8d205" providerId="LiveId" clId="{E7A54BC8-65DA-4538-AAED-9F147DC6437B}" dt="2026-09-29T04:09:28.856" v="98" actId="404"/>
-        <pc:sldMkLst>
-          <pc:docMk/>
-          <pc:sldMk cId="2680478113" sldId="430"/>
-        </pc:sldMkLst>
-        <pc:spChg chg="mod">
-          <ac:chgData name="Pasala Harini" userId="a43fac1939f8d205" providerId="LiveId" clId="{E7A54BC8-65DA-4538-AAED-9F147DC6437B}" dt="2026-09-29T04:09:28.856" v="98" actId="404"/>
-          <ac:spMkLst>
-            <pc:docMk/>
-            <pc:sldMk cId="2680478113" sldId="430"/>
-            <ac:spMk id="6" creationId="{7862E4AC-212E-43EC-956C-B30F3E8CC9D6}"/>
-          </ac:spMkLst>
-        </pc:spChg>
-        <pc:spChg chg="mod">
-          <ac:chgData name="Pasala Harini" userId="a43fac1939f8d205" providerId="LiveId" clId="{E7A54BC8-65DA-4538-AAED-9F147DC6437B}" dt="2026-09-28T16:57:25.611" v="94" actId="14100"/>
-          <ac:spMkLst>
-            <pc:docMk/>
-            <pc:sldMk cId="2680478113" sldId="430"/>
-            <ac:spMk id="7" creationId="{C8EF13C9-42FB-60ED-8B2A-1C9B552DE041}"/>
-          </ac:spMkLst>
-        </pc:spChg>
-      </pc:sldChg>
-      <pc:sldChg chg="modSp mod">
-        <pc:chgData name="Pasala Harini" userId="a43fac1939f8d205" providerId="LiveId" clId="{E7A54BC8-65DA-4538-AAED-9F147DC6437B}" dt="2026-09-29T17:38:32.826" v="229" actId="403"/>
-        <pc:sldMkLst>
-          <pc:docMk/>
-          <pc:sldMk cId="2803802370" sldId="431"/>
-        </pc:sldMkLst>
-        <pc:spChg chg="mod">
-          <ac:chgData name="Pasala Harini" userId="a43fac1939f8d205" providerId="LiveId" clId="{E7A54BC8-65DA-4538-AAED-9F147DC6437B}" dt="2026-09-29T04:09:41.411" v="99" actId="404"/>
-          <ac:spMkLst>
-            <pc:docMk/>
-            <pc:sldMk cId="2803802370" sldId="431"/>
-            <ac:spMk id="5" creationId="{7862E4AC-212E-43EC-956C-B30F3E8CC9D6}"/>
-          </ac:spMkLst>
-        </pc:spChg>
-        <pc:spChg chg="mod">
-          <ac:chgData name="Pasala Harini" userId="a43fac1939f8d205" providerId="LiveId" clId="{E7A54BC8-65DA-4538-AAED-9F147DC6437B}" dt="2026-09-29T17:38:32.826" v="229" actId="403"/>
-          <ac:spMkLst>
-            <pc:docMk/>
-            <pc:sldMk cId="2803802370" sldId="431"/>
-            <ac:spMk id="7" creationId="{C4B12F71-216B-4B4A-9933-2017B3D46F1E}"/>
-          </ac:spMkLst>
-        </pc:spChg>
-      </pc:sldChg>
-      <pc:sldChg chg="modSp mod">
-        <pc:chgData name="Pasala Harini" userId="a43fac1939f8d205" providerId="LiveId" clId="{E7A54BC8-65DA-4538-AAED-9F147DC6437B}" dt="2026-09-29T04:09:49.092" v="100" actId="404"/>
-        <pc:sldMkLst>
-          <pc:docMk/>
-          <pc:sldMk cId="2330033538" sldId="432"/>
-        </pc:sldMkLst>
-        <pc:spChg chg="mod">
-          <ac:chgData name="Pasala Harini" userId="a43fac1939f8d205" providerId="LiveId" clId="{E7A54BC8-65DA-4538-AAED-9F147DC6437B}" dt="2026-09-29T04:09:49.092" v="100" actId="404"/>
-          <ac:spMkLst>
-            <pc:docMk/>
-            <pc:sldMk cId="2330033538" sldId="432"/>
-            <ac:spMk id="5" creationId="{7862E4AC-212E-43EC-956C-B30F3E8CC9D6}"/>
-          </ac:spMkLst>
-        </pc:spChg>
-        <pc:spChg chg="mod">
-          <ac:chgData name="Pasala Harini" userId="a43fac1939f8d205" providerId="LiveId" clId="{E7A54BC8-65DA-4538-AAED-9F147DC6437B}" dt="2026-09-29T04:08:54.950" v="97" actId="1036"/>
-          <ac:spMkLst>
-            <pc:docMk/>
-            <pc:sldMk cId="2330033538" sldId="432"/>
-            <ac:spMk id="6" creationId="{C4B12F71-216B-4B4A-9933-2017B3D46F1E}"/>
-          </ac:spMkLst>
-        </pc:spChg>
-        <pc:spChg chg="mod">
-          <ac:chgData name="Pasala Harini" userId="a43fac1939f8d205" providerId="LiveId" clId="{E7A54BC8-65DA-4538-AAED-9F147DC6437B}" dt="2026-09-29T04:08:50.642" v="95" actId="113"/>
-          <ac:spMkLst>
-            <pc:docMk/>
-            <pc:sldMk cId="2330033538" sldId="432"/>
-            <ac:spMk id="8" creationId="{8D573B9C-6555-00E1-0D68-26F034C53609}"/>
-          </ac:spMkLst>
-        </pc:spChg>
-      </pc:sldChg>
-      <pc:sldChg chg="modSp mod">
-        <pc:chgData name="Pasala Harini" userId="a43fac1939f8d205" providerId="LiveId" clId="{E7A54BC8-65DA-4538-AAED-9F147DC6437B}" dt="2026-09-29T04:10:15.129" v="106" actId="404"/>
-        <pc:sldMkLst>
-          <pc:docMk/>
-          <pc:sldMk cId="969609640" sldId="572"/>
-        </pc:sldMkLst>
-        <pc:spChg chg="mod">
-          <ac:chgData name="Pasala Harini" userId="a43fac1939f8d205" providerId="LiveId" clId="{E7A54BC8-65DA-4538-AAED-9F147DC6437B}" dt="2026-09-28T16:51:17.718" v="42" actId="1076"/>
-          <ac:spMkLst>
-            <pc:docMk/>
-            <pc:sldMk cId="969609640" sldId="572"/>
-            <ac:spMk id="5" creationId="{7FCE3D1F-FE03-C000-DBE7-358E0F77A41D}"/>
-          </ac:spMkLst>
-        </pc:spChg>
-        <pc:spChg chg="mod">
-          <ac:chgData name="Pasala Harini" userId="a43fac1939f8d205" providerId="LiveId" clId="{E7A54BC8-65DA-4538-AAED-9F147DC6437B}" dt="2026-09-29T04:10:15.129" v="106" actId="404"/>
-          <ac:spMkLst>
-            <pc:docMk/>
-            <pc:sldMk cId="969609640" sldId="572"/>
-            <ac:spMk id="6" creationId="{7862E4AC-212E-43EC-956C-B30F3E8CC9D6}"/>
-          </ac:spMkLst>
-        </pc:spChg>
-        <pc:picChg chg="mod">
-          <ac:chgData name="Pasala Harini" userId="a43fac1939f8d205" providerId="LiveId" clId="{E7A54BC8-65DA-4538-AAED-9F147DC6437B}" dt="2026-09-28T16:51:14.296" v="41" actId="14100"/>
-          <ac:picMkLst>
-            <pc:docMk/>
-            <pc:sldMk cId="969609640" sldId="572"/>
-            <ac:picMk id="3" creationId="{5F4513AA-7A2F-3ACC-BB73-F5319B788AD2}"/>
-          </ac:picMkLst>
-        </pc:picChg>
-      </pc:sldChg>
-      <pc:sldChg chg="addSp delSp modSp mod">
-        <pc:chgData name="Pasala Harini" userId="a43fac1939f8d205" providerId="LiveId" clId="{E7A54BC8-65DA-4538-AAED-9F147DC6437B}" dt="2026-09-30T15:06:41.098" v="395" actId="1076"/>
-        <pc:sldMkLst>
-          <pc:docMk/>
-          <pc:sldMk cId="4210108629" sldId="573"/>
-        </pc:sldMkLst>
-        <pc:spChg chg="add del mod">
-          <ac:chgData name="Pasala Harini" userId="a43fac1939f8d205" providerId="LiveId" clId="{E7A54BC8-65DA-4538-AAED-9F147DC6437B}" dt="2026-09-30T15:05:25.665" v="348"/>
-          <ac:spMkLst>
-            <pc:docMk/>
-            <pc:sldMk cId="4210108629" sldId="573"/>
-            <ac:spMk id="2" creationId="{749185DE-1C03-CA71-C967-D158E352BC10}"/>
-          </ac:spMkLst>
-        </pc:spChg>
-        <pc:spChg chg="add mod">
-          <ac:chgData name="Pasala Harini" userId="a43fac1939f8d205" providerId="LiveId" clId="{E7A54BC8-65DA-4538-AAED-9F147DC6437B}" dt="2026-09-30T15:06:41.098" v="395" actId="1076"/>
-          <ac:spMkLst>
-            <pc:docMk/>
-            <pc:sldMk cId="4210108629" sldId="573"/>
-            <ac:spMk id="3" creationId="{722188A3-9DE5-06AB-8D14-F7246CDB24C8}"/>
-          </ac:spMkLst>
-        </pc:spChg>
-        <pc:spChg chg="mod">
-          <ac:chgData name="Pasala Harini" userId="a43fac1939f8d205" providerId="LiveId" clId="{E7A54BC8-65DA-4538-AAED-9F147DC6437B}" dt="2026-09-30T09:46:53.518" v="299" actId="14100"/>
-          <ac:spMkLst>
-            <pc:docMk/>
-            <pc:sldMk cId="4210108629" sldId="573"/>
-            <ac:spMk id="5" creationId="{1A3D2A67-5C04-F19E-BFB0-2BBC6E3C79EE}"/>
-          </ac:spMkLst>
-        </pc:spChg>
-        <pc:spChg chg="del">
-          <ac:chgData name="Pasala Harini" userId="a43fac1939f8d205" providerId="LiveId" clId="{E7A54BC8-65DA-4538-AAED-9F147DC6437B}" dt="2026-09-29T04:10:40.984" v="111" actId="478"/>
-          <ac:spMkLst>
-            <pc:docMk/>
-            <pc:sldMk cId="4210108629" sldId="573"/>
-            <ac:spMk id="6" creationId="{7862E4AC-212E-43EC-956C-B30F3E8CC9D6}"/>
-          </ac:spMkLst>
-        </pc:spChg>
-        <pc:picChg chg="del mod">
-          <ac:chgData name="Pasala Harini" userId="a43fac1939f8d205" providerId="LiveId" clId="{E7A54BC8-65DA-4538-AAED-9F147DC6437B}" dt="2026-09-29T17:42:50.384" v="250" actId="21"/>
-          <ac:picMkLst>
-            <pc:docMk/>
-            <pc:sldMk cId="4210108629" sldId="573"/>
-            <ac:picMk id="3" creationId="{25D9A582-7444-6A7E-F30B-A2675A8D26D9}"/>
-          </ac:picMkLst>
-        </pc:picChg>
-        <pc:picChg chg="add mod">
-          <ac:chgData name="Pasala Harini" userId="a43fac1939f8d205" providerId="LiveId" clId="{E7A54BC8-65DA-4538-AAED-9F147DC6437B}" dt="2026-09-29T17:43:24.098" v="259" actId="14100"/>
-          <ac:picMkLst>
-            <pc:docMk/>
-            <pc:sldMk cId="4210108629" sldId="573"/>
-            <ac:picMk id="4" creationId="{7920D9B3-BE79-22BA-F37E-2AD5985C037B}"/>
-          </ac:picMkLst>
-        </pc:picChg>
-        <pc:picChg chg="del mod">
-          <ac:chgData name="Pasala Harini" userId="a43fac1939f8d205" providerId="LiveId" clId="{E7A54BC8-65DA-4538-AAED-9F147DC6437B}" dt="2026-09-29T17:43:11.925" v="255" actId="478"/>
-          <ac:picMkLst>
-            <pc:docMk/>
-            <pc:sldMk cId="4210108629" sldId="573"/>
-            <ac:picMk id="7" creationId="{73881C6C-EEE5-10BB-78A8-18C29E4A520C}"/>
-          </ac:picMkLst>
-        </pc:picChg>
-        <pc:picChg chg="del mod">
-          <ac:chgData name="Pasala Harini" userId="a43fac1939f8d205" providerId="LiveId" clId="{E7A54BC8-65DA-4538-AAED-9F147DC6437B}" dt="2026-09-29T17:43:10.096" v="254" actId="478"/>
-          <ac:picMkLst>
-            <pc:docMk/>
-            <pc:sldMk cId="4210108629" sldId="573"/>
-            <ac:picMk id="9" creationId="{6F68061D-C4B0-F214-C528-4954FB12A6E8}"/>
-          </ac:picMkLst>
-        </pc:picChg>
-      </pc:sldChg>
-      <pc:sldChg chg="modSp mod">
-        <pc:chgData name="Pasala Harini" userId="a43fac1939f8d205" providerId="LiveId" clId="{E7A54BC8-65DA-4538-AAED-9F147DC6437B}" dt="2026-09-29T17:38:21.671" v="227" actId="404"/>
-        <pc:sldMkLst>
-          <pc:docMk/>
-          <pc:sldMk cId="1266168113" sldId="578"/>
-        </pc:sldMkLst>
-        <pc:spChg chg="mod">
-          <ac:chgData name="Pasala Harini" userId="a43fac1939f8d205" providerId="LiveId" clId="{E7A54BC8-65DA-4538-AAED-9F147DC6437B}" dt="2026-09-29T04:09:55.854" v="101" actId="404"/>
-          <ac:spMkLst>
-            <pc:docMk/>
-            <pc:sldMk cId="1266168113" sldId="578"/>
-            <ac:spMk id="7" creationId="{7862E4AC-212E-43EC-956C-B30F3E8CC9D6}"/>
-          </ac:spMkLst>
-        </pc:spChg>
-        <pc:spChg chg="mod">
-          <ac:chgData name="Pasala Harini" userId="a43fac1939f8d205" providerId="LiveId" clId="{E7A54BC8-65DA-4538-AAED-9F147DC6437B}" dt="2026-09-29T17:38:21.671" v="227" actId="404"/>
-          <ac:spMkLst>
-            <pc:docMk/>
-            <pc:sldMk cId="1266168113" sldId="578"/>
-            <ac:spMk id="9" creationId="{05440583-7BF8-97BA-39B1-5B9E62885429}"/>
-          </ac:spMkLst>
-        </pc:spChg>
-      </pc:sldChg>
-      <pc:sldChg chg="modSp mod">
-        <pc:chgData name="Pasala Harini" userId="a43fac1939f8d205" providerId="LiveId" clId="{E7A54BC8-65DA-4538-AAED-9F147DC6437B}" dt="2026-09-28T16:55:46.331" v="79" actId="1076"/>
-        <pc:sldMkLst>
-          <pc:docMk/>
-          <pc:sldMk cId="4128008891" sldId="579"/>
-        </pc:sldMkLst>
-        <pc:spChg chg="mod">
-          <ac:chgData name="Pasala Harini" userId="a43fac1939f8d205" providerId="LiveId" clId="{E7A54BC8-65DA-4538-AAED-9F147DC6437B}" dt="2026-09-28T16:55:46.331" v="79" actId="1076"/>
-          <ac:spMkLst>
-            <pc:docMk/>
-            <pc:sldMk cId="4128008891" sldId="579"/>
-            <ac:spMk id="6" creationId="{327050FF-8130-C4A5-5CC4-84CE300DB268}"/>
-          </ac:spMkLst>
-        </pc:spChg>
-      </pc:sldChg>
-      <pc:sldChg chg="delSp modSp mod">
-        <pc:chgData name="Pasala Harini" userId="a43fac1939f8d205" providerId="LiveId" clId="{E7A54BC8-65DA-4538-AAED-9F147DC6437B}" dt="2026-09-29T04:11:01.163" v="116" actId="14100"/>
-        <pc:sldMkLst>
-          <pc:docMk/>
-          <pc:sldMk cId="1551062153" sldId="580"/>
-        </pc:sldMkLst>
-        <pc:spChg chg="mod">
-          <ac:chgData name="Pasala Harini" userId="a43fac1939f8d205" providerId="LiveId" clId="{E7A54BC8-65DA-4538-AAED-9F147DC6437B}" dt="2026-09-28T16:51:53.207" v="46" actId="1076"/>
-          <ac:spMkLst>
-            <pc:docMk/>
-            <pc:sldMk cId="1551062153" sldId="580"/>
-            <ac:spMk id="5" creationId="{92711EC5-1B4F-4A38-70EE-6EF19D700A29}"/>
-          </ac:spMkLst>
-        </pc:spChg>
-        <pc:spChg chg="del mod">
-          <ac:chgData name="Pasala Harini" userId="a43fac1939f8d205" providerId="LiveId" clId="{E7A54BC8-65DA-4538-AAED-9F147DC6437B}" dt="2026-09-29T04:10:24.841" v="108" actId="478"/>
-          <ac:spMkLst>
-            <pc:docMk/>
-            <pc:sldMk cId="1551062153" sldId="580"/>
-            <ac:spMk id="6" creationId="{B44B98DD-3DBB-B787-302B-FF43DFF5E5CA}"/>
-          </ac:spMkLst>
-        </pc:spChg>
-        <pc:picChg chg="mod">
-          <ac:chgData name="Pasala Harini" userId="a43fac1939f8d205" providerId="LiveId" clId="{E7A54BC8-65DA-4538-AAED-9F147DC6437B}" dt="2026-09-29T04:11:01.163" v="116" actId="14100"/>
-          <ac:picMkLst>
-            <pc:docMk/>
-            <pc:sldMk cId="1551062153" sldId="580"/>
-            <ac:picMk id="3" creationId="{3C3BD0CA-668F-1F53-D54A-221AE773B462}"/>
-          </ac:picMkLst>
-        </pc:picChg>
-        <pc:picChg chg="mod">
-          <ac:chgData name="Pasala Harini" userId="a43fac1939f8d205" providerId="LiveId" clId="{E7A54BC8-65DA-4538-AAED-9F147DC6437B}" dt="2026-09-29T04:10:55.095" v="114" actId="14100"/>
-          <ac:picMkLst>
-            <pc:docMk/>
-            <pc:sldMk cId="1551062153" sldId="580"/>
-            <ac:picMk id="7" creationId="{EC70A956-D7D4-2391-E754-AC878EF550ED}"/>
-          </ac:picMkLst>
-        </pc:picChg>
-        <pc:picChg chg="mod">
-          <ac:chgData name="Pasala Harini" userId="a43fac1939f8d205" providerId="LiveId" clId="{E7A54BC8-65DA-4538-AAED-9F147DC6437B}" dt="2026-09-28T16:52:53.014" v="56" actId="14861"/>
-          <ac:picMkLst>
-            <pc:docMk/>
-            <pc:sldMk cId="1551062153" sldId="580"/>
-            <ac:picMk id="9" creationId="{AFED696B-06E5-4E7A-FDD5-2B982AA1144E}"/>
-          </ac:picMkLst>
-        </pc:picChg>
-      </pc:sldChg>
-      <pc:sldChg chg="addSp delSp modSp del mod">
-        <pc:chgData name="Pasala Harini" userId="a43fac1939f8d205" providerId="LiveId" clId="{E7A54BC8-65DA-4538-AAED-9F147DC6437B}" dt="2026-09-30T09:55:06.507" v="341" actId="47"/>
-        <pc:sldMkLst>
-          <pc:docMk/>
-          <pc:sldMk cId="1252088719" sldId="581"/>
-        </pc:sldMkLst>
-        <pc:spChg chg="del mod">
-          <ac:chgData name="Pasala Harini" userId="a43fac1939f8d205" providerId="LiveId" clId="{E7A54BC8-65DA-4538-AAED-9F147DC6437B}" dt="2026-09-30T09:54:42.713" v="334"/>
-          <ac:spMkLst>
-            <pc:docMk/>
-            <pc:sldMk cId="1252088719" sldId="581"/>
-            <ac:spMk id="5" creationId="{3AB1DA72-960C-A29A-D6CA-F40106A859DD}"/>
-          </ac:spMkLst>
-        </pc:spChg>
-        <pc:spChg chg="del">
-          <ac:chgData name="Pasala Harini" userId="a43fac1939f8d205" providerId="LiveId" clId="{E7A54BC8-65DA-4538-AAED-9F147DC6437B}" dt="2026-09-29T04:13:30.879" v="142" actId="478"/>
-          <ac:spMkLst>
-            <pc:docMk/>
-            <pc:sldMk cId="1252088719" sldId="581"/>
-            <ac:spMk id="6" creationId="{BD3B7ED8-30B4-F8F3-A610-7661DD8D0ECB}"/>
-          </ac:spMkLst>
-        </pc:spChg>
-        <pc:picChg chg="del mod">
-          <ac:chgData name="Pasala Harini" userId="a43fac1939f8d205" providerId="LiveId" clId="{E7A54BC8-65DA-4538-AAED-9F147DC6437B}" dt="2026-09-29T04:47:29.412" v="185" actId="478"/>
-          <ac:picMkLst>
-            <pc:docMk/>
-            <pc:sldMk cId="1252088719" sldId="581"/>
-            <ac:picMk id="3" creationId="{E156C1BC-822E-FBDA-82C1-137B2E7F85EE}"/>
-          </ac:picMkLst>
-        </pc:picChg>
-        <pc:picChg chg="add del mod">
-          <ac:chgData name="Pasala Harini" userId="a43fac1939f8d205" providerId="LiveId" clId="{E7A54BC8-65DA-4538-AAED-9F147DC6437B}" dt="2026-09-30T09:54:10.603" v="324" actId="21"/>
-          <ac:picMkLst>
-            <pc:docMk/>
-            <pc:sldMk cId="1252088719" sldId="581"/>
-            <ac:picMk id="4" creationId="{2CDC628F-AB90-4F4E-1F99-2307B8B29FC7}"/>
-          </ac:picMkLst>
-        </pc:picChg>
-        <pc:picChg chg="add del mod">
-          <ac:chgData name="Pasala Harini" userId="a43fac1939f8d205" providerId="LiveId" clId="{E7A54BC8-65DA-4538-AAED-9F147DC6437B}" dt="2026-09-30T09:51:14.670" v="312" actId="478"/>
-          <ac:picMkLst>
-            <pc:docMk/>
-            <pc:sldMk cId="1252088719" sldId="581"/>
-            <ac:picMk id="7" creationId="{C8BB0ADA-418E-442E-6CA7-9EC9E8687C29}"/>
-          </ac:picMkLst>
-        </pc:picChg>
-      </pc:sldChg>
-      <pc:sldChg chg="addSp delSp modSp mod">
-        <pc:chgData name="Pasala Harini" userId="a43fac1939f8d205" providerId="LiveId" clId="{E7A54BC8-65DA-4538-AAED-9F147DC6437B}" dt="2026-09-30T09:49:53.352" v="311" actId="14100"/>
-        <pc:sldMkLst>
-          <pc:docMk/>
-          <pc:sldMk cId="2305683475" sldId="582"/>
-        </pc:sldMkLst>
-        <pc:spChg chg="mod">
-          <ac:chgData name="Pasala Harini" userId="a43fac1939f8d205" providerId="LiveId" clId="{E7A54BC8-65DA-4538-AAED-9F147DC6437B}" dt="2026-09-30T09:49:53.352" v="311" actId="14100"/>
-          <ac:spMkLst>
-            <pc:docMk/>
-            <pc:sldMk cId="2305683475" sldId="582"/>
-            <ac:spMk id="5" creationId="{0DEBCEC4-7319-EA14-A623-46C2DA843DC9}"/>
-          </ac:spMkLst>
-        </pc:spChg>
-        <pc:spChg chg="del">
-          <ac:chgData name="Pasala Harini" userId="a43fac1939f8d205" providerId="LiveId" clId="{E7A54BC8-65DA-4538-AAED-9F147DC6437B}" dt="2026-09-29T04:10:29.075" v="109" actId="478"/>
-          <ac:spMkLst>
-            <pc:docMk/>
-            <pc:sldMk cId="2305683475" sldId="582"/>
-            <ac:spMk id="6" creationId="{9DCC1A73-C8D1-720C-DA6D-83BF4E627FC6}"/>
-          </ac:spMkLst>
-        </pc:spChg>
-        <pc:picChg chg="add mod">
-          <ac:chgData name="Pasala Harini" userId="a43fac1939f8d205" providerId="LiveId" clId="{E7A54BC8-65DA-4538-AAED-9F147DC6437B}" dt="2026-09-29T17:41:34.820" v="244" actId="1076"/>
-          <ac:picMkLst>
-            <pc:docMk/>
-            <pc:sldMk cId="2305683475" sldId="582"/>
-            <ac:picMk id="3" creationId="{A0077CFA-7773-CA7D-6BA4-21E4D2BAD1C8}"/>
-          </ac:picMkLst>
-        </pc:picChg>
-        <pc:picChg chg="del mod">
-          <ac:chgData name="Pasala Harini" userId="a43fac1939f8d205" providerId="LiveId" clId="{E7A54BC8-65DA-4538-AAED-9F147DC6437B}" dt="2026-09-29T04:19:31.175" v="147" actId="478"/>
-          <ac:picMkLst>
-            <pc:docMk/>
-            <pc:sldMk cId="2305683475" sldId="582"/>
-            <ac:picMk id="3" creationId="{DC258007-DA6E-102E-F099-241DA162CA2D}"/>
-          </ac:picMkLst>
-        </pc:picChg>
-        <pc:picChg chg="add mod">
-          <ac:chgData name="Pasala Harini" userId="a43fac1939f8d205" providerId="LiveId" clId="{E7A54BC8-65DA-4538-AAED-9F147DC6437B}" dt="2026-09-29T17:41:13.362" v="239" actId="1076"/>
-          <ac:picMkLst>
-            <pc:docMk/>
-            <pc:sldMk cId="2305683475" sldId="582"/>
-            <ac:picMk id="4" creationId="{53841D39-4505-0E3D-E5C4-1CC81393D441}"/>
-          </ac:picMkLst>
-        </pc:picChg>
-        <pc:picChg chg="add del">
-          <ac:chgData name="Pasala Harini" userId="a43fac1939f8d205" providerId="LiveId" clId="{E7A54BC8-65DA-4538-AAED-9F147DC6437B}" dt="2026-09-30T09:48:26.286" v="301" actId="22"/>
-          <ac:picMkLst>
-            <pc:docMk/>
-            <pc:sldMk cId="2305683475" sldId="582"/>
-            <ac:picMk id="6" creationId="{F94D8F96-5E42-7194-A03B-37548FACE4CC}"/>
-          </ac:picMkLst>
-        </pc:picChg>
-      </pc:sldChg>
-      <pc:sldChg chg="delSp modSp del mod ord">
-        <pc:chgData name="Pasala Harini" userId="a43fac1939f8d205" providerId="LiveId" clId="{E7A54BC8-65DA-4538-AAED-9F147DC6437B}" dt="2026-09-29T17:46:42.853" v="285" actId="47"/>
-        <pc:sldMkLst>
-          <pc:docMk/>
-          <pc:sldMk cId="3107207361" sldId="583"/>
-        </pc:sldMkLst>
-        <pc:spChg chg="del">
-          <ac:chgData name="Pasala Harini" userId="a43fac1939f8d205" providerId="LiveId" clId="{E7A54BC8-65DA-4538-AAED-9F147DC6437B}" dt="2026-09-29T04:10:33.505" v="110" actId="478"/>
-          <ac:spMkLst>
-            <pc:docMk/>
-            <pc:sldMk cId="3107207361" sldId="583"/>
-            <ac:spMk id="6" creationId="{614BD3B0-17ED-C1B2-A2F6-7C9011EE9760}"/>
-          </ac:spMkLst>
-        </pc:spChg>
-        <pc:picChg chg="del mod">
-          <ac:chgData name="Pasala Harini" userId="a43fac1939f8d205" providerId="LiveId" clId="{E7A54BC8-65DA-4538-AAED-9F147DC6437B}" dt="2026-09-29T17:44:21.161" v="264" actId="478"/>
-          <ac:picMkLst>
-            <pc:docMk/>
-            <pc:sldMk cId="3107207361" sldId="583"/>
-            <ac:picMk id="7" creationId="{C160FCA0-531F-2319-950E-C72B58405003}"/>
-          </ac:picMkLst>
-        </pc:picChg>
-      </pc:sldChg>
-      <pc:sldChg chg="addSp delSp modSp new mod ord">
-        <pc:chgData name="Pasala Harini" userId="a43fac1939f8d205" providerId="LiveId" clId="{E7A54BC8-65DA-4538-AAED-9F147DC6437B}" dt="2026-09-29T17:46:25.157" v="283" actId="14100"/>
-        <pc:sldMkLst>
-          <pc:docMk/>
-          <pc:sldMk cId="3597504881" sldId="584"/>
-        </pc:sldMkLst>
-        <pc:picChg chg="add del mod">
-          <ac:chgData name="Pasala Harini" userId="a43fac1939f8d205" providerId="LiveId" clId="{E7A54BC8-65DA-4538-AAED-9F147DC6437B}" dt="2026-09-29T17:43:15.759" v="256" actId="21"/>
-          <ac:picMkLst>
-            <pc:docMk/>
-            <pc:sldMk cId="3597504881" sldId="584"/>
-            <ac:picMk id="6" creationId="{15C3FF3B-FEE9-7246-38E1-5CC0781940B7}"/>
-          </ac:picMkLst>
-        </pc:picChg>
-        <pc:picChg chg="add mod">
-          <ac:chgData name="Pasala Harini" userId="a43fac1939f8d205" providerId="LiveId" clId="{E7A54BC8-65DA-4538-AAED-9F147DC6437B}" dt="2026-09-29T17:46:25.157" v="283" actId="14100"/>
-          <ac:picMkLst>
-            <pc:docMk/>
-            <pc:sldMk cId="3597504881" sldId="584"/>
-            <ac:picMk id="7" creationId="{81C166F0-0ED9-232A-638B-D8027A380AC4}"/>
-          </ac:picMkLst>
-        </pc:picChg>
-        <pc:picChg chg="add mod">
-          <ac:chgData name="Pasala Harini" userId="a43fac1939f8d205" providerId="LiveId" clId="{E7A54BC8-65DA-4538-AAED-9F147DC6437B}" dt="2026-09-29T17:46:20.665" v="282" actId="14100"/>
-          <ac:picMkLst>
-            <pc:docMk/>
-            <pc:sldMk cId="3597504881" sldId="584"/>
-            <ac:picMk id="8" creationId="{01B2B359-428F-9DC5-4FDE-26D39BC3F0E6}"/>
-          </ac:picMkLst>
-        </pc:picChg>
-      </pc:sldChg>
-      <pc:sldChg chg="addSp delSp modSp new add del mod">
-        <pc:chgData name="Pasala Harini" userId="a43fac1939f8d205" providerId="LiveId" clId="{E7A54BC8-65DA-4538-AAED-9F147DC6437B}" dt="2026-09-29T17:46:29.319" v="284" actId="47"/>
-        <pc:sldMkLst>
-          <pc:docMk/>
-          <pc:sldMk cId="1471650649" sldId="585"/>
-        </pc:sldMkLst>
-        <pc:picChg chg="add del">
-          <ac:chgData name="Pasala Harini" userId="a43fac1939f8d205" providerId="LiveId" clId="{E7A54BC8-65DA-4538-AAED-9F147DC6437B}" dt="2026-09-29T17:43:42.976" v="261" actId="478"/>
-          <ac:picMkLst>
-            <pc:docMk/>
-            <pc:sldMk cId="1471650649" sldId="585"/>
-            <ac:picMk id="6" creationId="{6F6BDCB9-986F-1118-1E05-53728F134A3E}"/>
-          </ac:picMkLst>
-        </pc:picChg>
-        <pc:picChg chg="add del">
-          <ac:chgData name="Pasala Harini" userId="a43fac1939f8d205" providerId="LiveId" clId="{E7A54BC8-65DA-4538-AAED-9F147DC6437B}" dt="2026-09-29T17:43:48.311" v="262" actId="478"/>
-          <ac:picMkLst>
-            <pc:docMk/>
-            <pc:sldMk cId="1471650649" sldId="585"/>
-            <ac:picMk id="8" creationId="{1F65F684-1E20-577B-25B6-91006CC9B8F1}"/>
-          </ac:picMkLst>
-        </pc:picChg>
-        <pc:picChg chg="add del">
-          <ac:chgData name="Pasala Harini" userId="a43fac1939f8d205" providerId="LiveId" clId="{E7A54BC8-65DA-4538-AAED-9F147DC6437B}" dt="2026-09-29T17:43:50.226" v="263" actId="478"/>
-          <ac:picMkLst>
-            <pc:docMk/>
-            <pc:sldMk cId="1471650649" sldId="585"/>
-            <ac:picMk id="10" creationId="{B69D0BB5-CC1C-0702-C171-3BB748405CDF}"/>
-          </ac:picMkLst>
-        </pc:picChg>
-        <pc:picChg chg="add del mod">
-          <ac:chgData name="Pasala Harini" userId="a43fac1939f8d205" providerId="LiveId" clId="{E7A54BC8-65DA-4538-AAED-9F147DC6437B}" dt="2026-09-29T17:46:07.786" v="278" actId="21"/>
-          <ac:picMkLst>
-            <pc:docMk/>
-            <pc:sldMk cId="1471650649" sldId="585"/>
-            <ac:picMk id="12" creationId="{24C023EC-9C2B-2455-2580-ED6F797019CD}"/>
-          </ac:picMkLst>
-        </pc:picChg>
-      </pc:sldChg>
-      <pc:sldChg chg="addSp delSp modSp new mod">
-        <pc:chgData name="Pasala Harini" userId="a43fac1939f8d205" providerId="LiveId" clId="{E7A54BC8-65DA-4538-AAED-9F147DC6437B}" dt="2026-09-30T15:08:42.061" v="442" actId="1076"/>
-        <pc:sldMkLst>
-          <pc:docMk/>
-          <pc:sldMk cId="3364757397" sldId="586"/>
-        </pc:sldMkLst>
-        <pc:spChg chg="add mod">
-          <ac:chgData name="Pasala Harini" userId="a43fac1939f8d205" providerId="LiveId" clId="{E7A54BC8-65DA-4538-AAED-9F147DC6437B}" dt="2026-09-30T09:54:05.507" v="323" actId="1076"/>
-          <ac:spMkLst>
-            <pc:docMk/>
-            <pc:sldMk cId="3364757397" sldId="586"/>
-            <ac:spMk id="5" creationId="{13A63782-9B9E-8864-EC70-EB296A8C656C}"/>
-          </ac:spMkLst>
-        </pc:spChg>
-        <pc:spChg chg="add mod">
-          <ac:chgData name="Pasala Harini" userId="a43fac1939f8d205" providerId="LiveId" clId="{E7A54BC8-65DA-4538-AAED-9F147DC6437B}" dt="2026-09-30T15:07:41.907" v="397" actId="1076"/>
-          <ac:spMkLst>
-            <pc:docMk/>
-            <pc:sldMk cId="3364757397" sldId="586"/>
-            <ac:spMk id="9" creationId="{2309705A-F395-16FC-16FE-70B2F1B87798}"/>
-          </ac:spMkLst>
-        </pc:spChg>
-        <pc:spChg chg="add del mod">
-          <ac:chgData name="Pasala Harini" userId="a43fac1939f8d205" providerId="LiveId" clId="{E7A54BC8-65DA-4538-AAED-9F147DC6437B}" dt="2026-09-30T10:18:43.456" v="343" actId="478"/>
-          <ac:spMkLst>
-            <pc:docMk/>
-            <pc:sldMk cId="3364757397" sldId="586"/>
-            <ac:spMk id="10" creationId="{F560D7BF-40C5-A92A-C7D9-6E9886F2798B}"/>
-          </ac:spMkLst>
-        </pc:spChg>
-        <pc:spChg chg="add mod">
-          <ac:chgData name="Pasala Harini" userId="a43fac1939f8d205" providerId="LiveId" clId="{E7A54BC8-65DA-4538-AAED-9F147DC6437B}" dt="2026-09-30T15:08:42.061" v="442" actId="1076"/>
-          <ac:spMkLst>
-            <pc:docMk/>
-            <pc:sldMk cId="3364757397" sldId="586"/>
-            <ac:spMk id="11" creationId="{7A351FC5-F330-E852-1499-7BEC10AA23FE}"/>
-          </ac:spMkLst>
-        </pc:spChg>
-        <pc:picChg chg="add mod">
-          <ac:chgData name="Pasala Harini" userId="a43fac1939f8d205" providerId="LiveId" clId="{E7A54BC8-65DA-4538-AAED-9F147DC6437B}" dt="2026-09-30T09:54:36.138" v="331" actId="1076"/>
-          <ac:picMkLst>
-            <pc:docMk/>
-            <pc:sldMk cId="3364757397" sldId="586"/>
-            <ac:picMk id="6" creationId="{BFAF3B2E-90A8-1FED-91E3-CFEF25035AF6}"/>
-          </ac:picMkLst>
-        </pc:picChg>
-        <pc:picChg chg="add mod">
-          <ac:chgData name="Pasala Harini" userId="a43fac1939f8d205" providerId="LiveId" clId="{E7A54BC8-65DA-4538-AAED-9F147DC6437B}" dt="2026-09-30T15:07:30.313" v="396" actId="1076"/>
-          <ac:picMkLst>
-            <pc:docMk/>
-            <pc:sldMk cId="3364757397" sldId="586"/>
-            <ac:picMk id="8" creationId="{37F38872-2B93-73E4-721F-0EF3445B6FF0}"/>
-          </ac:picMkLst>
-        </pc:picChg>
-      </pc:sldChg>
-      <pc:sldChg chg="addSp delSp modSp new mod">
-        <pc:chgData name="Pasala Harini" userId="a43fac1939f8d205" providerId="LiveId" clId="{E7A54BC8-65DA-4538-AAED-9F147DC6437B}" dt="2026-09-30T15:14:54.773" v="459" actId="1076"/>
-        <pc:sldMkLst>
-          <pc:docMk/>
-          <pc:sldMk cId="825377146" sldId="587"/>
-        </pc:sldMkLst>
-        <pc:picChg chg="add del mod">
-          <ac:chgData name="Pasala Harini" userId="a43fac1939f8d205" providerId="LiveId" clId="{E7A54BC8-65DA-4538-AAED-9F147DC6437B}" dt="2026-09-30T15:14:39.774" v="454" actId="21"/>
-          <ac:picMkLst>
-            <pc:docMk/>
-            <pc:sldMk cId="825377146" sldId="587"/>
-            <ac:picMk id="6" creationId="{7C26BDBF-DD17-1AAC-2647-4E7CCF7E6EF0}"/>
-          </ac:picMkLst>
-        </pc:picChg>
-        <pc:picChg chg="add mod">
-          <ac:chgData name="Pasala Harini" userId="a43fac1939f8d205" providerId="LiveId" clId="{E7A54BC8-65DA-4538-AAED-9F147DC6437B}" dt="2026-09-30T15:14:54.773" v="459" actId="1076"/>
-          <ac:picMkLst>
-            <pc:docMk/>
-            <pc:sldMk cId="825377146" sldId="587"/>
-            <ac:picMk id="8" creationId="{853306CD-BEE5-ED52-D138-D3289EFD592B}"/>
-          </ac:picMkLst>
-        </pc:picChg>
-      </pc:sldChg>
-      <pc:sldChg chg="addSp delSp modSp new mod ord">
-        <pc:chgData name="Pasala Harini" userId="a43fac1939f8d205" providerId="LiveId" clId="{E7A54BC8-65DA-4538-AAED-9F147DC6437B}" dt="2026-09-30T15:42:08.602" v="689" actId="1076"/>
-        <pc:sldMkLst>
-          <pc:docMk/>
-          <pc:sldMk cId="2007204440" sldId="588"/>
-        </pc:sldMkLst>
-        <pc:spChg chg="add mod">
-          <ac:chgData name="Pasala Harini" userId="a43fac1939f8d205" providerId="LiveId" clId="{E7A54BC8-65DA-4538-AAED-9F147DC6437B}" dt="2026-09-30T15:15:51.576" v="507" actId="1076"/>
-          <ac:spMkLst>
-            <pc:docMk/>
-            <pc:sldMk cId="2007204440" sldId="588"/>
-            <ac:spMk id="9" creationId="{F7F7C3E0-7F16-3FBB-7354-5F5B1E3188EB}"/>
-          </ac:spMkLst>
-        </pc:spChg>
-        <pc:picChg chg="add mod">
-          <ac:chgData name="Pasala Harini" userId="a43fac1939f8d205" providerId="LiveId" clId="{E7A54BC8-65DA-4538-AAED-9F147DC6437B}" dt="2026-09-30T15:42:07.066" v="688" actId="1076"/>
-          <ac:picMkLst>
-            <pc:docMk/>
-            <pc:sldMk cId="2007204440" sldId="588"/>
-            <ac:picMk id="6" creationId="{622ECC51-6818-D349-CCAE-8B5B6141C519}"/>
-          </ac:picMkLst>
-        </pc:picChg>
-        <pc:picChg chg="add mod">
-          <ac:chgData name="Pasala Harini" userId="a43fac1939f8d205" providerId="LiveId" clId="{E7A54BC8-65DA-4538-AAED-9F147DC6437B}" dt="2026-09-30T15:42:08.602" v="689" actId="1076"/>
-          <ac:picMkLst>
-            <pc:docMk/>
-            <pc:sldMk cId="2007204440" sldId="588"/>
-            <ac:picMk id="8" creationId="{7D6D80F1-A4B4-4583-4336-AD74737A484F}"/>
-          </ac:picMkLst>
-        </pc:picChg>
-        <pc:picChg chg="add del mod">
-          <ac:chgData name="Pasala Harini" userId="a43fac1939f8d205" providerId="LiveId" clId="{E7A54BC8-65DA-4538-AAED-9F147DC6437B}" dt="2026-09-30T15:41:34.054" v="677" actId="21"/>
-          <ac:picMkLst>
-            <pc:docMk/>
-            <pc:sldMk cId="2007204440" sldId="588"/>
-            <ac:picMk id="11" creationId="{900FBD39-F505-B0F1-1F38-6E8A3591328A}"/>
-          </ac:picMkLst>
-        </pc:picChg>
-      </pc:sldChg>
-      <pc:sldChg chg="addSp modSp new mod ord">
-        <pc:chgData name="Pasala Harini" userId="a43fac1939f8d205" providerId="LiveId" clId="{E7A54BC8-65DA-4538-AAED-9F147DC6437B}" dt="2026-09-30T15:21:38.896" v="578" actId="1076"/>
-        <pc:sldMkLst>
-          <pc:docMk/>
-          <pc:sldMk cId="1935650526" sldId="589"/>
-        </pc:sldMkLst>
-        <pc:spChg chg="add mod">
-          <ac:chgData name="Pasala Harini" userId="a43fac1939f8d205" providerId="LiveId" clId="{E7A54BC8-65DA-4538-AAED-9F147DC6437B}" dt="2026-09-30T15:21:06.433" v="547" actId="1076"/>
-          <ac:spMkLst>
-            <pc:docMk/>
-            <pc:sldMk cId="1935650526" sldId="589"/>
-            <ac:spMk id="5" creationId="{681FE8CB-2188-92A6-DF37-1271A7832C66}"/>
-          </ac:spMkLst>
-        </pc:spChg>
-        <pc:spChg chg="add mod">
-          <ac:chgData name="Pasala Harini" userId="a43fac1939f8d205" providerId="LiveId" clId="{E7A54BC8-65DA-4538-AAED-9F147DC6437B}" dt="2026-09-30T15:21:38.896" v="578" actId="1076"/>
-          <ac:spMkLst>
-            <pc:docMk/>
-            <pc:sldMk cId="1935650526" sldId="589"/>
-            <ac:spMk id="6" creationId="{38DFC0A9-7679-6D6D-F535-E5B5922394F2}"/>
-          </ac:spMkLst>
-        </pc:spChg>
-      </pc:sldChg>
-      <pc:sldChg chg="addSp delSp modSp new mod ord">
-        <pc:chgData name="Pasala Harini" userId="a43fac1939f8d205" providerId="LiveId" clId="{E7A54BC8-65DA-4538-AAED-9F147DC6437B}" dt="2026-09-30T15:30:39.606" v="668"/>
-        <pc:sldMkLst>
-          <pc:docMk/>
-          <pc:sldMk cId="3611838434" sldId="590"/>
-        </pc:sldMkLst>
-        <pc:spChg chg="add del mod">
-          <ac:chgData name="Pasala Harini" userId="a43fac1939f8d205" providerId="LiveId" clId="{E7A54BC8-65DA-4538-AAED-9F147DC6437B}" dt="2026-09-30T15:27:19.372" v="586"/>
-          <ac:spMkLst>
-            <pc:docMk/>
-            <pc:sldMk cId="3611838434" sldId="590"/>
-            <ac:spMk id="5" creationId="{4AB2F6A3-5E54-3D16-3A84-E2065535DEF5}"/>
-          </ac:spMkLst>
-        </pc:spChg>
-        <pc:spChg chg="add mod">
-          <ac:chgData name="Pasala Harini" userId="a43fac1939f8d205" providerId="LiveId" clId="{E7A54BC8-65DA-4538-AAED-9F147DC6437B}" dt="2026-09-30T15:28:25.093" v="635" actId="1076"/>
-          <ac:spMkLst>
-            <pc:docMk/>
-            <pc:sldMk cId="3611838434" sldId="590"/>
-            <ac:spMk id="8" creationId="{03A1CCEC-51CC-2BF5-D58C-328A19E4E7F3}"/>
-          </ac:spMkLst>
-        </pc:spChg>
-        <pc:picChg chg="add mod">
-          <ac:chgData name="Pasala Harini" userId="a43fac1939f8d205" providerId="LiveId" clId="{E7A54BC8-65DA-4538-AAED-9F147DC6437B}" dt="2026-09-30T15:27:41.957" v="592" actId="14100"/>
-          <ac:picMkLst>
-            <pc:docMk/>
-            <pc:sldMk cId="3611838434" sldId="590"/>
-            <ac:picMk id="7" creationId="{4599E619-49F5-DFAD-126E-DB6E95B114C5}"/>
-          </ac:picMkLst>
-        </pc:picChg>
-      </pc:sldChg>
-      <pc:sldChg chg="addSp delSp modSp new mod">
-        <pc:chgData name="Pasala Harini" userId="a43fac1939f8d205" providerId="LiveId" clId="{E7A54BC8-65DA-4538-AAED-9F147DC6437B}" dt="2026-09-30T17:08:18.236" v="701" actId="14100"/>
-        <pc:sldMkLst>
-          <pc:docMk/>
-          <pc:sldMk cId="2910460756" sldId="591"/>
-        </pc:sldMkLst>
-        <pc:spChg chg="add mod">
-          <ac:chgData name="Pasala Harini" userId="a43fac1939f8d205" providerId="LiveId" clId="{E7A54BC8-65DA-4538-AAED-9F147DC6437B}" dt="2026-09-30T15:30:28.279" v="666" actId="1076"/>
-          <ac:spMkLst>
-            <pc:docMk/>
-            <pc:sldMk cId="2910460756" sldId="591"/>
-            <ac:spMk id="7" creationId="{F7AC80C0-791C-55E8-F1AA-81428B16CC9B}"/>
-          </ac:spMkLst>
-        </pc:spChg>
-        <pc:spChg chg="add del mod">
-          <ac:chgData name="Pasala Harini" userId="a43fac1939f8d205" providerId="LiveId" clId="{E7A54BC8-65DA-4538-AAED-9F147DC6437B}" dt="2026-09-30T15:44:37.027" v="697"/>
-          <ac:spMkLst>
-            <pc:docMk/>
-            <pc:sldMk cId="2910460756" sldId="591"/>
-            <ac:spMk id="8" creationId="{19E48B62-D6D0-1B8A-6DBA-B095D663C514}"/>
-          </ac:spMkLst>
-        </pc:spChg>
-        <pc:picChg chg="add del mod">
-          <ac:chgData name="Pasala Harini" userId="a43fac1939f8d205" providerId="LiveId" clId="{E7A54BC8-65DA-4538-AAED-9F147DC6437B}" dt="2026-09-30T15:32:12.968" v="669" actId="478"/>
-          <ac:picMkLst>
-            <pc:docMk/>
-            <pc:sldMk cId="2910460756" sldId="591"/>
-            <ac:picMk id="6" creationId="{F2B421BA-713C-5D0B-0B5D-83445331726A}"/>
-          </ac:picMkLst>
-        </pc:picChg>
-        <pc:picChg chg="add mod">
-          <ac:chgData name="Pasala Harini" userId="a43fac1939f8d205" providerId="LiveId" clId="{E7A54BC8-65DA-4538-AAED-9F147DC6437B}" dt="2026-09-30T17:08:18.236" v="701" actId="14100"/>
-          <ac:picMkLst>
-            <pc:docMk/>
-            <pc:sldMk cId="2910460756" sldId="591"/>
-            <ac:picMk id="10" creationId="{7BF569E9-E39E-F04D-6098-F19688369BCB}"/>
-          </ac:picMkLst>
-        </pc:picChg>
-      </pc:sldChg>
-      <pc:sldChg chg="addSp modSp new mod">
-        <pc:chgData name="Pasala Harini" userId="a43fac1939f8d205" providerId="LiveId" clId="{E7A54BC8-65DA-4538-AAED-9F147DC6437B}" dt="2026-09-30T15:42:15.657" v="691" actId="14100"/>
-        <pc:sldMkLst>
-          <pc:docMk/>
-          <pc:sldMk cId="444095180" sldId="592"/>
-        </pc:sldMkLst>
-        <pc:picChg chg="add mod">
-          <ac:chgData name="Pasala Harini" userId="a43fac1939f8d205" providerId="LiveId" clId="{E7A54BC8-65DA-4538-AAED-9F147DC6437B}" dt="2026-09-30T15:42:15.657" v="691" actId="14100"/>
-          <ac:picMkLst>
-            <pc:docMk/>
-            <pc:sldMk cId="444095180" sldId="592"/>
-            <ac:picMk id="6" creationId="{E2D45278-D03E-BCE0-FCF7-2716B22B1B05}"/>
-          </ac:picMkLst>
-        </pc:picChg>
-      </pc:sldChg>
-    </pc:docChg>
-  </pc:docChgLst>
-</pc:chgInfo>
-</file>
-
 <file path=ppt/handoutMasters/handoutMaster1.xml><?xml version="1.0" encoding="utf-8"?>
 <p:handoutMaster xmlns:a="http://schemas.openxmlformats.org/drawingml/2006/main" xmlns:r="http://schemas.openxmlformats.org/officeDocument/2006/relationships" xmlns:p="http://schemas.openxmlformats.org/presentationml/2006/main">
   <p:cSld>
@@ -982,7 +253,7 @@
             <a:fld id="{3F2DB80D-D8DC-40C9-8603-2D92EB853E85}" type="datetimeFigureOut">
               <a:rPr lang="en-US" smtClean="0"/>
               <a:pPr/>
-              <a:t>10/1/2026</a:t>
+              <a:t>10/2/26</a:t>
             </a:fld>
             <a:endParaRPr lang="en-US" dirty="0"/>
           </a:p>
@@ -1150,7 +421,7 @@
             <a:fld id="{C7EF2DC9-9E6B-4115-80F7-AF3C0B919820}" type="datetimeFigureOut">
               <a:rPr lang="en-US" smtClean="0"/>
               <a:pPr/>
-              <a:t>10/1/2026</a:t>
+              <a:t>10/2/26</a:t>
             </a:fld>
             <a:endParaRPr lang="en-US" dirty="0"/>
           </a:p>
@@ -1782,7 +1053,7 @@
             <a:fld id="{8368060C-F3A5-4600-9262-589A0797613D}" type="datetime1">
               <a:rPr lang="en-IN" smtClean="0"/>
               <a:pPr/>
-              <a:t>01-10-2026</a:t>
+              <a:t>02/10/26</a:t>
             </a:fld>
             <a:endParaRPr lang="en-US" dirty="0"/>
           </a:p>
@@ -2035,7 +1306,7 @@
             <a:fld id="{8368060C-F3A5-4600-9262-589A0797613D}" type="datetime1">
               <a:rPr lang="en-IN" smtClean="0"/>
               <a:pPr/>
-              <a:t>01-10-2026</a:t>
+              <a:t>02/10/26</a:t>
             </a:fld>
             <a:endParaRPr lang="en-US" dirty="0"/>
           </a:p>
@@ -2288,7 +1559,7 @@
             <a:fld id="{8433AD86-BCE5-402A-9A63-AC164DC60237}" type="datetime1">
               <a:rPr lang="en-IN" smtClean="0"/>
               <a:pPr/>
-              <a:t>01-10-2026</a:t>
+              <a:t>02/10/26</a:t>
             </a:fld>
             <a:endParaRPr lang="en-US" dirty="0"/>
           </a:p>
@@ -3256,7 +2527,7 @@
             <a:fld id="{8368060C-F3A5-4600-9262-589A0797613D}" type="datetime1">
               <a:rPr lang="en-IN" smtClean="0"/>
               <a:pPr/>
-              <a:t>01-10-2026</a:t>
+              <a:t>02/10/26</a:t>
             </a:fld>
             <a:endParaRPr lang="en-US" dirty="0"/>
           </a:p>
@@ -3524,7 +2795,7 @@
             <a:fld id="{8368060C-F3A5-4600-9262-589A0797613D}" type="datetime1">
               <a:rPr lang="en-IN" smtClean="0"/>
               <a:pPr/>
-              <a:t>01-10-2026</a:t>
+              <a:t>02/10/26</a:t>
             </a:fld>
             <a:endParaRPr lang="en-US" dirty="0"/>
           </a:p>
@@ -3796,7 +3067,7 @@
             <a:fld id="{8368060C-F3A5-4600-9262-589A0797613D}" type="datetime1">
               <a:rPr lang="en-IN" smtClean="0"/>
               <a:pPr/>
-              <a:t>01-10-2026</a:t>
+              <a:t>02/10/26</a:t>
             </a:fld>
             <a:endParaRPr lang="en-US" dirty="0"/>
           </a:p>
@@ -4078,7 +3349,7 @@
             <a:fld id="{8368060C-F3A5-4600-9262-589A0797613D}" type="datetime1">
               <a:rPr lang="en-IN" smtClean="0"/>
               <a:pPr/>
-              <a:t>01-10-2026</a:t>
+              <a:t>02/10/26</a:t>
             </a:fld>
             <a:endParaRPr lang="en-US" dirty="0"/>
           </a:p>
@@ -4392,7 +3663,7 @@
             <a:fld id="{8368060C-F3A5-4600-9262-589A0797613D}" type="datetime1">
               <a:rPr lang="en-IN" smtClean="0"/>
               <a:pPr/>
-              <a:t>01-10-2026</a:t>
+              <a:t>02/10/26</a:t>
             </a:fld>
             <a:endParaRPr lang="en-US" dirty="0"/>
           </a:p>
@@ -4621,7 +3892,7 @@
             <a:fld id="{8368060C-F3A5-4600-9262-589A0797613D}" type="datetime1">
               <a:rPr lang="en-IN" smtClean="0"/>
               <a:pPr/>
-              <a:t>01-10-2026</a:t>
+              <a:t>02/10/26</a:t>
             </a:fld>
             <a:endParaRPr lang="en-US" dirty="0"/>
           </a:p>
@@ -4844,7 +4115,7 @@
             <a:fld id="{8368060C-F3A5-4600-9262-589A0797613D}" type="datetime1">
               <a:rPr lang="en-IN" smtClean="0"/>
               <a:pPr/>
-              <a:t>01-10-2026</a:t>
+              <a:t>02/10/26</a:t>
             </a:fld>
             <a:endParaRPr lang="en-US" dirty="0"/>
           </a:p>
@@ -5073,7 +4344,7 @@
             <a:fld id="{8368060C-F3A5-4600-9262-589A0797613D}" type="datetime1">
               <a:rPr lang="en-IN" smtClean="0"/>
               <a:pPr/>
-              <a:t>01-10-2026</a:t>
+              <a:t>02/10/26</a:t>
             </a:fld>
             <a:endParaRPr lang="en-US" dirty="0"/>
           </a:p>
@@ -5303,7 +4574,7 @@
             <a:fld id="{8368060C-F3A5-4600-9262-589A0797613D}" type="datetime1">
               <a:rPr lang="en-IN" smtClean="0"/>
               <a:pPr/>
-              <a:t>01-10-2026</a:t>
+              <a:t>02/10/26</a:t>
             </a:fld>
             <a:endParaRPr lang="en-US" dirty="0"/>
           </a:p>
@@ -6615,8 +5886,8 @@
         </p:nvSpPr>
         <p:spPr>
           <a:xfrm>
-            <a:off x="1055441" y="2269762"/>
-            <a:ext cx="9793088" cy="3170099"/>
+            <a:off x="807315" y="1705894"/>
+            <a:ext cx="10113221" cy="4801314"/>
           </a:xfrm>
           <a:prstGeom prst="rect">
             <a:avLst/>
@@ -6629,29 +5900,90 @@
           </a:bodyPr>
           <a:lstStyle/>
           <a:p>
-            <a:pPr lvl="0"/>
-            <a:r>
-              <a:rPr lang="en-IN" sz="2800" dirty="0"/>
-              <a:t>Optimize Inventory: Stock high-demand flavors like Chocolate and Vanilla.</a:t>
-            </a:r>
-          </a:p>
-          <a:p>
-            <a:pPr lvl="0"/>
-            <a:r>
-              <a:rPr lang="en-IN" sz="2800" dirty="0"/>
-              <a:t>Improve Staffing &amp; Prep: Adjust staff and batch preparation for peak sales days.</a:t>
-            </a:r>
-          </a:p>
-          <a:p>
-            <a:pPr lvl="0"/>
-            <a:r>
-              <a:rPr lang="en-IN" sz="2800" dirty="0"/>
-              <a:t>Targeted Marketing: Promote flavors based on customer age groups and preferences.</a:t>
+            <a:pPr lvl="0">
+              <a:lnSpc>
+                <a:spcPct val="150000"/>
+              </a:lnSpc>
+            </a:pPr>
+            <a:r>
+              <a:rPr lang="en-IN" sz="2000" dirty="0"/>
+              <a:t>Energy Monitoring: </a:t>
+            </a:r>
+            <a:r>
+              <a:rPr lang="en-IN" sz="2000" dirty="0" err="1"/>
+              <a:t>Analyze</a:t>
+            </a:r>
+            <a:r>
+              <a:rPr lang="en-IN" sz="2000" dirty="0"/>
+              <a:t> electricity and other energy meter readings across buildings.</a:t>
+            </a:r>
+          </a:p>
+          <a:p>
+            <a:pPr lvl="0">
+              <a:lnSpc>
+                <a:spcPct val="150000"/>
+              </a:lnSpc>
+            </a:pPr>
+            <a:r>
+              <a:rPr lang="en-IN" sz="2000" dirty="0"/>
+              <a:t>Building Analysis: Study how building type, size, age, and floor count affect energy consumption.</a:t>
+            </a:r>
+          </a:p>
+          <a:p>
+            <a:pPr lvl="0">
+              <a:lnSpc>
+                <a:spcPct val="150000"/>
+              </a:lnSpc>
+            </a:pPr>
+            <a:r>
+              <a:rPr lang="en-IN" sz="2000" dirty="0"/>
+              <a:t>Weather Impact: </a:t>
+            </a:r>
+            <a:r>
+              <a:rPr lang="en-IN" sz="2000" dirty="0" err="1"/>
+              <a:t>Analyze</a:t>
+            </a:r>
+            <a:r>
+              <a:rPr lang="en-IN" sz="2000" dirty="0"/>
+              <a:t> the influence of temperature, humidity, wind, and other weather conditions.</a:t>
+            </a:r>
+          </a:p>
+          <a:p>
+            <a:pPr lvl="0">
+              <a:lnSpc>
+                <a:spcPct val="150000"/>
+              </a:lnSpc>
+            </a:pPr>
+            <a:r>
+              <a:rPr lang="en-IN" sz="2000" dirty="0"/>
+              <a:t>Consumption Pattern Analysis: Identify daily, weekly, and monthly energy usage patterns.</a:t>
+            </a:r>
+          </a:p>
+          <a:p>
+            <a:pPr lvl="0">
+              <a:lnSpc>
+                <a:spcPct val="150000"/>
+              </a:lnSpc>
+            </a:pPr>
+            <a:r>
+              <a:rPr lang="en-IN" sz="2000" dirty="0"/>
+              <a:t>Energy Efficiency: Detect unusual consumption and identify opportunities to reduce energy waste.</a:t>
+            </a:r>
+          </a:p>
+          <a:p>
+            <a:pPr lvl="0">
+              <a:lnSpc>
+                <a:spcPct val="150000"/>
+              </a:lnSpc>
+            </a:pPr>
+            <a:r>
+              <a:rPr lang="en-IN" sz="2000" dirty="0"/>
+              <a:t>Sustainable Management: Use data-driven insights to support efficient and sustainable energy usage.</a:t>
             </a:r>
           </a:p>
           <a:p>
             <a:pPr algn="just"/>
-            <a:endParaRPr lang="en-IN" sz="3200" dirty="0"/>
+            <a:endParaRPr lang="en-IN" sz="3600" dirty="0"/>
           </a:p>
         </p:txBody>
       </p:sp>
@@ -6872,7 +6204,7 @@
             <a:fld id="{8368060C-F3A5-4600-9262-589A0797613D}" type="datetime1">
               <a:rPr lang="en-IN" smtClean="0"/>
               <a:pPr/>
-              <a:t>01-10-2026</a:t>
+              <a:t>02/10/26</a:t>
             </a:fld>
             <a:endParaRPr lang="en-US" dirty="0"/>
           </a:p>
